--- a/ppt/world-university-ranking-analysis.pptx
+++ b/ppt/world-university-ranking-analysis.pptx
@@ -6519,7 +6519,7 @@
                 <a:ea typeface="Calibri" pitchFamily="34" charset="-122"/>
                 <a:cs typeface="Calibri" pitchFamily="34" charset="-120"/>
               </a:rPr>
-              <a:t>Internationalization is the most actionable trait</a:t>
+              <a:t>Internationalization may be a promising lever</a:t>
             </a:r>
             <a:endParaRPr lang="en-US" sz="1350" dirty="0"/>
           </a:p>
@@ -6561,7 +6561,7 @@
                 <a:ea typeface="Calibri" pitchFamily="34" charset="-122"/>
                 <a:cs typeface="Calibri" pitchFamily="34" charset="-120"/>
               </a:rPr>
-              <a:t>r = 0.52 is a moderate correlation — it's the trait most responsive to short-term policy (admissions, recruitment), unlike research capacity, which takes years to build.</a:t>
+              <a:t>r = 0.52 (share of international students) is moderate, so it may prove a good aspect to build: diversity can be grown through admissions and recruitment far faster than research capacity.</a:t>
             </a:r>
             <a:endParaRPr lang="en-US" sz="1150" dirty="0"/>
           </a:p>
